--- a/index/designs/y7-l11/l2-time-conversion/l2-time-conversion.pptx
+++ b/index/designs/y7-l11/l2-time-conversion/l2-time-conversion.pptx
@@ -11178,9 +11178,6 @@
               </a:rPr>
               <a:t>3 tied groups:</a:t>
             </a:r>
-            <a:pPr algn="l" indent="0" marL="0">
-              <a:buNone/>
-            </a:pPr>
             <a:r>
               <a:rPr lang="en-US" sz="1100" dirty="0">
                 <a:solidFill>
@@ -13212,12 +13209,6 @@
               </a:rPr>
               <a:t>On your paper, write one digital time and its Chinese conversion that you're </a:t>
             </a:r>
-            <a:pPr algn="l" indent="0" marL="0">
-              <a:lnSpc>
-                <a:spcPts val="1540"/>
-              </a:lnSpc>
-              <a:buNone/>
-            </a:pPr>
             <a:r>
               <a:rPr lang="en-US" sz="1100" b="1" dirty="0">
                 <a:solidFill>
@@ -13229,12 +13220,6 @@
               </a:rPr>
               <a:t>confident</a:t>
             </a:r>
-            <a:pPr algn="l" indent="0" marL="0">
-              <a:lnSpc>
-                <a:spcPts val="1540"/>
-              </a:lnSpc>
-              <a:buNone/>
-            </a:pPr>
             <a:r>
               <a:rPr lang="en-US" sz="1100" dirty="0">
                 <a:solidFill>
@@ -13363,9 +13348,6 @@
               </a:rPr>
               <a:t>Convert </a:t>
             </a:r>
-            <a:pPr algn="l" indent="0" marL="0">
-              <a:buNone/>
-            </a:pPr>
             <a:r>
               <a:rPr lang="en-US" sz="1400" b="1" dirty="0">
                 <a:solidFill>
@@ -13377,9 +13359,6 @@
               </a:rPr>
               <a:t>15:30</a:t>
             </a:r>
-            <a:pPr algn="l" indent="0" marL="0">
-              <a:buNone/>
-            </a:pPr>
             <a:r>
               <a:rPr lang="en-US" sz="1400" dirty="0">
                 <a:solidFill>
@@ -13995,12 +13974,6 @@
               </a:rPr>
               <a:t>Convert </a:t>
             </a:r>
-            <a:pPr algn="ctr" indent="0" marL="0">
-              <a:spcAft>
-                <a:spcPts val="1200"/>
-              </a:spcAft>
-              <a:buNone/>
-            </a:pPr>
             <a:r>
               <a:rPr lang="en-US" sz="1400" b="1" dirty="0">
                 <a:solidFill>
@@ -14012,12 +13985,6 @@
               </a:rPr>
               <a:t>15:30</a:t>
             </a:r>
-            <a:pPr algn="ctr" indent="0" marL="0">
-              <a:spcAft>
-                <a:spcPts val="1200"/>
-              </a:spcAft>
-              <a:buNone/>
-            </a:pPr>
             <a:r>
               <a:rPr lang="en-US" sz="1400" dirty="0">
                 <a:solidFill>
@@ -14457,15 +14424,6 @@
               <a:t>You can now convert any digital time into a full Chinese time expression.
 </a:t>
             </a:r>
-            <a:pPr algn="ctr" indent="0" marL="0">
-              <a:lnSpc>
-                <a:spcPts val="1950"/>
-              </a:lnSpc>
-              <a:spcAft>
-                <a:spcPts val="800"/>
-              </a:spcAft>
-              <a:buNone/>
-            </a:pPr>
             <a:r>
               <a:rPr lang="en-US" sz="1300" b="1" dirty="0">
                 <a:solidFill>
@@ -14678,6 +14636,31 @@
               </a:rPr>
               <a:t>Today: </a:t>
             </a:r>
+            <a:r>
+              <a:rPr lang="en-US" sz="1100" b="1" dirty="0">
+                <a:solidFill>
+                  <a:srgbClr val="C8943E"/>
+                </a:solidFill>
+                <a:latin typeface="Noto Sans SC" pitchFamily="34" charset="0"/>
+                <a:ea typeface="Noto Sans SC" pitchFamily="34" charset="-122"/>
+                <a:cs typeface="Noto Sans SC" pitchFamily="34" charset="-120"/>
+              </a:rPr>
+              <a:t>时间词 + 点 + 分/半/刻/差</a:t>
+            </a:r>
+            <a:r>
+              <a:rPr lang="en-US" sz="1100" dirty="0">
+                <a:solidFill>
+                  <a:srgbClr val="8B94A3"/>
+                </a:solidFill>
+                <a:latin typeface="Noto Sans SC" pitchFamily="34" charset="0"/>
+                <a:ea typeface="Noto Sans SC" pitchFamily="34" charset="-122"/>
+                <a:cs typeface="Noto Sans SC" pitchFamily="34" charset="-120"/>
+              </a:rPr>
+              <a:t> = a full time expression</a:t>
+            </a:r>
+            <a:endParaRPr lang="en-US" sz="1100" dirty="0"/>
+          </a:p>
+          <a:p>
             <a:pPr algn="ctr" indent="0" marL="0">
               <a:lnSpc>
                 <a:spcPts val="1760"/>
@@ -14685,16 +14668,19 @@
               <a:buNone/>
             </a:pPr>
             <a:r>
-              <a:rPr lang="en-US" sz="1100" b="1" dirty="0">
-                <a:solidFill>
-                  <a:srgbClr val="C8943E"/>
-                </a:solidFill>
-                <a:latin typeface="Noto Sans SC" pitchFamily="34" charset="0"/>
-                <a:ea typeface="Noto Sans SC" pitchFamily="34" charset="-122"/>
-                <a:cs typeface="Noto Sans SC" pitchFamily="34" charset="-120"/>
-              </a:rPr>
-              <a:t>时间词 + 点 + 分/半/刻/差</a:t>
-            </a:r>
+              <a:rPr lang="en-US" sz="1100" dirty="0">
+                <a:solidFill>
+                  <a:srgbClr val="8B94A3"/>
+                </a:solidFill>
+                <a:latin typeface="Noto Sans SC" pitchFamily="34" charset="0"/>
+                <a:ea typeface="Noto Sans SC" pitchFamily="34" charset="-122"/>
+                <a:cs typeface="Noto Sans SC" pitchFamily="34" charset="-120"/>
+              </a:rPr>
+              <a:t>Next: </a:t>
+            </a:r>
+            <a:endParaRPr lang="en-US" sz="1100" dirty="0"/>
+          </a:p>
+          <a:p>
             <a:pPr algn="ctr" indent="0" marL="0">
               <a:lnSpc>
                 <a:spcPts val="1760"/>
@@ -14702,6 +14688,17 @@
               <a:buNone/>
             </a:pPr>
             <a:r>
+              <a:rPr lang="en-US" sz="1100" b="1" dirty="0">
+                <a:solidFill>
+                  <a:srgbClr val="C8943E"/>
+                </a:solidFill>
+                <a:latin typeface="Noto Sans SC" pitchFamily="34" charset="0"/>
+                <a:ea typeface="Noto Sans SC" pitchFamily="34" charset="-122"/>
+                <a:cs typeface="Noto Sans SC" pitchFamily="34" charset="-120"/>
+              </a:rPr>
+              <a:t>部首</a:t>
+            </a:r>
+            <a:r>
               <a:rPr lang="en-US" sz="1100" dirty="0">
                 <a:solidFill>
                   <a:srgbClr val="8B94A3"/>
@@ -14710,37 +14707,8 @@
                 <a:ea typeface="Noto Sans SC" pitchFamily="34" charset="-122"/>
                 <a:cs typeface="Noto Sans SC" pitchFamily="34" charset="-120"/>
               </a:rPr>
-              <a:t> = a full time expression</a:t>
-            </a:r>
-            <a:endParaRPr lang="en-US" sz="1100" dirty="0"/>
-          </a:p>
-          <a:p>
-            <a:pPr algn="ctr" indent="0" marL="0">
-              <a:lnSpc>
-                <a:spcPts val="1760"/>
-              </a:lnSpc>
-              <a:buNone/>
-            </a:pPr>
-            <a:r>
-              <a:rPr lang="en-US" sz="1100" dirty="0">
-                <a:solidFill>
-                  <a:srgbClr val="8B94A3"/>
-                </a:solidFill>
-                <a:latin typeface="Noto Sans SC" pitchFamily="34" charset="0"/>
-                <a:ea typeface="Noto Sans SC" pitchFamily="34" charset="-122"/>
-                <a:cs typeface="Noto Sans SC" pitchFamily="34" charset="-120"/>
-              </a:rPr>
-              <a:t>Next: </a:t>
-            </a:r>
-            <a:endParaRPr lang="en-US" sz="1100" dirty="0"/>
-          </a:p>
-          <a:p>
-            <a:pPr algn="ctr" indent="0" marL="0">
-              <a:lnSpc>
-                <a:spcPts val="1760"/>
-              </a:lnSpc>
-              <a:buNone/>
-            </a:pPr>
+              <a:t> (radicals) &amp; </a:t>
+            </a:r>
             <a:r>
               <a:rPr lang="en-US" sz="1100" b="1" dirty="0">
                 <a:solidFill>
@@ -14750,48 +14718,8 @@
                 <a:ea typeface="Noto Sans SC" pitchFamily="34" charset="-122"/>
                 <a:cs typeface="Noto Sans SC" pitchFamily="34" charset="-120"/>
               </a:rPr>
-              <a:t>部首</a:t>
-            </a:r>
-            <a:pPr algn="ctr" indent="0" marL="0">
-              <a:lnSpc>
-                <a:spcPts val="1760"/>
-              </a:lnSpc>
-              <a:buNone/>
-            </a:pPr>
-            <a:r>
-              <a:rPr lang="en-US" sz="1100" dirty="0">
-                <a:solidFill>
-                  <a:srgbClr val="8B94A3"/>
-                </a:solidFill>
-                <a:latin typeface="Noto Sans SC" pitchFamily="34" charset="0"/>
-                <a:ea typeface="Noto Sans SC" pitchFamily="34" charset="-122"/>
-                <a:cs typeface="Noto Sans SC" pitchFamily="34" charset="-120"/>
-              </a:rPr>
-              <a:t> (radicals) &amp; </a:t>
-            </a:r>
-            <a:pPr algn="ctr" indent="0" marL="0">
-              <a:lnSpc>
-                <a:spcPts val="1760"/>
-              </a:lnSpc>
-              <a:buNone/>
-            </a:pPr>
-            <a:r>
-              <a:rPr lang="en-US" sz="1100" b="1" dirty="0">
-                <a:solidFill>
-                  <a:srgbClr val="C8943E"/>
-                </a:solidFill>
-                <a:latin typeface="Noto Sans SC" pitchFamily="34" charset="0"/>
-                <a:ea typeface="Noto Sans SC" pitchFamily="34" charset="-122"/>
-                <a:cs typeface="Noto Sans SC" pitchFamily="34" charset="-120"/>
-              </a:rPr>
               <a:t>拼音听力</a:t>
             </a:r>
-            <a:pPr algn="ctr" indent="0" marL="0">
-              <a:lnSpc>
-                <a:spcPts val="1760"/>
-              </a:lnSpc>
-              <a:buNone/>
-            </a:pPr>
             <a:r>
               <a:rPr lang="en-US" sz="1100" dirty="0">
                 <a:solidFill>
@@ -17921,12 +17849,6 @@
               </a:rPr>
               <a:t>Item 5 — 09:45:</a:t>
             </a:r>
-            <a:pPr algn="l" indent="0" marL="0">
-              <a:lnSpc>
-                <a:spcPts val="1650"/>
-              </a:lnSpc>
-              <a:buNone/>
-            </a:pPr>
             <a:r>
               <a:rPr lang="en-US" sz="1100" dirty="0">
                 <a:solidFill>
@@ -18329,12 +18251,6 @@
               </a:rPr>
               <a:t>We are learning to combine a </a:t>
             </a:r>
-            <a:pPr algn="l" indent="0" marL="0">
-              <a:lnSpc>
-                <a:spcPts val="1960"/>
-              </a:lnSpc>
-              <a:buNone/>
-            </a:pPr>
             <a:r>
               <a:rPr lang="en-US" sz="1400" b="1" dirty="0">
                 <a:solidFill>
@@ -18346,12 +18262,6 @@
               </a:rPr>
               <a:t>time-of-day word</a:t>
             </a:r>
-            <a:pPr algn="l" indent="0" marL="0">
-              <a:lnSpc>
-                <a:spcPts val="1960"/>
-              </a:lnSpc>
-              <a:buNone/>
-            </a:pPr>
             <a:r>
               <a:rPr lang="en-US" sz="1400" dirty="0">
                 <a:solidFill>
@@ -18363,12 +18273,6 @@
               </a:rPr>
               <a:t> with a </a:t>
             </a:r>
-            <a:pPr algn="l" indent="0" marL="0">
-              <a:lnSpc>
-                <a:spcPts val="1960"/>
-              </a:lnSpc>
-              <a:buNone/>
-            </a:pPr>
             <a:r>
               <a:rPr lang="en-US" sz="1400" b="1" dirty="0">
                 <a:solidFill>
@@ -18380,12 +18284,6 @@
               </a:rPr>
               <a:t>clock time</a:t>
             </a:r>
-            <a:pPr algn="l" indent="0" marL="0">
-              <a:lnSpc>
-                <a:spcPts val="1960"/>
-              </a:lnSpc>
-              <a:buNone/>
-            </a:pPr>
             <a:r>
               <a:rPr lang="en-US" sz="1400" dirty="0">
                 <a:solidFill>
@@ -18512,12 +18410,6 @@
               </a:rPr>
               <a:t>I can convert a digital time into Chinese with the correct </a:t>
             </a:r>
-            <a:pPr algn="l" indent="0" marL="0">
-              <a:lnSpc>
-                <a:spcPts val="1690"/>
-              </a:lnSpc>
-              <a:buNone/>
-            </a:pPr>
             <a:r>
               <a:rPr lang="en-US" sz="1300" b="1" dirty="0">
                 <a:solidFill>
@@ -18529,12 +18421,6 @@
               </a:rPr>
               <a:t>time-of-day prefix</a:t>
             </a:r>
-            <a:pPr algn="l" indent="0" marL="0">
-              <a:lnSpc>
-                <a:spcPts val="1690"/>
-              </a:lnSpc>
-              <a:buNone/>
-            </a:pPr>
             <a:r>
               <a:rPr lang="en-US" sz="1300" dirty="0">
                 <a:solidFill>
@@ -18703,12 +18589,6 @@
               </a:rPr>
               <a:t>I can order a set of Chinese characters by </a:t>
             </a:r>
-            <a:pPr algn="l" indent="0" marL="0">
-              <a:lnSpc>
-                <a:spcPts val="1690"/>
-              </a:lnSpc>
-              <a:buNone/>
-            </a:pPr>
             <a:r>
               <a:rPr lang="en-US" sz="1300" b="1" dirty="0">
                 <a:solidFill>
@@ -18720,12 +18600,6 @@
               </a:rPr>
               <a:t>stroke count</a:t>
             </a:r>
-            <a:pPr algn="l" indent="0" marL="0">
-              <a:lnSpc>
-                <a:spcPts val="1690"/>
-              </a:lnSpc>
-              <a:buNone/>
-            </a:pPr>
             <a:r>
               <a:rPr lang="en-US" sz="1300" dirty="0">
                 <a:solidFill>
@@ -18894,12 +18768,6 @@
               </a:rPr>
               <a:t>I can spot which time-of-day word is needed just from the </a:t>
             </a:r>
-            <a:pPr algn="l" indent="0" marL="0">
-              <a:lnSpc>
-                <a:spcPts val="1690"/>
-              </a:lnSpc>
-              <a:buNone/>
-            </a:pPr>
             <a:r>
               <a:rPr lang="en-US" sz="1300" b="1" dirty="0">
                 <a:solidFill>
@@ -18911,12 +18779,6 @@
               </a:rPr>
               <a:t>digital time</a:t>
             </a:r>
-            <a:pPr algn="l" indent="0" marL="0">
-              <a:lnSpc>
-                <a:spcPts val="1690"/>
-              </a:lnSpc>
-              <a:buNone/>
-            </a:pPr>
             <a:r>
               <a:rPr lang="en-US" sz="1300" dirty="0">
                 <a:solidFill>
@@ -19640,10 +19502,46 @@
               </a:rPr>
               <a:t>07:00</a:t>
             </a:r>
+            <a:r>
+              <a:rPr lang="en-US" sz="1200" dirty="0">
+                <a:solidFill>
+                  <a:srgbClr val="1E2A38"/>
+                </a:solidFill>
+                <a:latin typeface="Noto Sans SC" pitchFamily="34" charset="0"/>
+                <a:ea typeface="Noto Sans SC" pitchFamily="34" charset="-122"/>
+                <a:cs typeface="Noto Sans SC" pitchFamily="34" charset="-120"/>
+              </a:rPr>
+              <a:t> → </a:t>
+            </a:r>
+            <a:r>
+              <a:rPr lang="en-US" sz="1200" b="1" dirty="0">
+                <a:solidFill>
+                  <a:srgbClr val="1E2A38"/>
+                </a:solidFill>
+                <a:latin typeface="Noto Sans SC" pitchFamily="34" charset="0"/>
+                <a:ea typeface="Noto Sans SC" pitchFamily="34" charset="-122"/>
+                <a:cs typeface="Noto Sans SC" pitchFamily="34" charset="-120"/>
+              </a:rPr>
+              <a:t>早上七点</a:t>
+            </a:r>
+            <a:endParaRPr lang="en-US" sz="1200" dirty="0"/>
+          </a:p>
+          <a:p>
             <a:pPr algn="l" indent="0" marL="0">
               <a:buNone/>
             </a:pPr>
             <a:r>
+              <a:rPr lang="en-US" sz="1200" b="1" dirty="0">
+                <a:solidFill>
+                  <a:srgbClr val="C8943E"/>
+                </a:solidFill>
+                <a:latin typeface="Noto Sans SC" pitchFamily="34" charset="0"/>
+                <a:ea typeface="Noto Sans SC" pitchFamily="34" charset="-122"/>
+                <a:cs typeface="Noto Sans SC" pitchFamily="34" charset="-120"/>
+              </a:rPr>
+              <a:t>10:30</a:t>
+            </a:r>
+            <a:r>
               <a:rPr lang="en-US" sz="1200" dirty="0">
                 <a:solidFill>
                   <a:srgbClr val="1E2A38"/>
@@ -19654,19 +19552,55 @@
               </a:rPr>
               <a:t> → </a:t>
             </a:r>
+            <a:r>
+              <a:rPr lang="en-US" sz="1200" b="1" dirty="0">
+                <a:solidFill>
+                  <a:srgbClr val="1E2A38"/>
+                </a:solidFill>
+                <a:latin typeface="Noto Sans SC" pitchFamily="34" charset="0"/>
+                <a:ea typeface="Noto Sans SC" pitchFamily="34" charset="-122"/>
+                <a:cs typeface="Noto Sans SC" pitchFamily="34" charset="-120"/>
+              </a:rPr>
+              <a:t>上午十点半</a:t>
+            </a:r>
+            <a:endParaRPr lang="en-US" sz="1200" dirty="0"/>
+          </a:p>
+          <a:p>
             <a:pPr algn="l" indent="0" marL="0">
               <a:buNone/>
             </a:pPr>
             <a:r>
               <a:rPr lang="en-US" sz="1200" b="1" dirty="0">
                 <a:solidFill>
+                  <a:srgbClr val="C8943E"/>
+                </a:solidFill>
+                <a:latin typeface="Noto Sans SC" pitchFamily="34" charset="0"/>
+                <a:ea typeface="Noto Sans SC" pitchFamily="34" charset="-122"/>
+                <a:cs typeface="Noto Sans SC" pitchFamily="34" charset="-120"/>
+              </a:rPr>
+              <a:t>12:00</a:t>
+            </a:r>
+            <a:r>
+              <a:rPr lang="en-US" sz="1200" dirty="0">
+                <a:solidFill>
                   <a:srgbClr val="1E2A38"/>
                 </a:solidFill>
                 <a:latin typeface="Noto Sans SC" pitchFamily="34" charset="0"/>
                 <a:ea typeface="Noto Sans SC" pitchFamily="34" charset="-122"/>
                 <a:cs typeface="Noto Sans SC" pitchFamily="34" charset="-120"/>
               </a:rPr>
-              <a:t>早上七点</a:t>
+              <a:t> → </a:t>
+            </a:r>
+            <a:r>
+              <a:rPr lang="en-US" sz="1200" b="1" dirty="0">
+                <a:solidFill>
+                  <a:srgbClr val="1E2A38"/>
+                </a:solidFill>
+                <a:latin typeface="Noto Sans SC" pitchFamily="34" charset="0"/>
+                <a:ea typeface="Noto Sans SC" pitchFamily="34" charset="-122"/>
+                <a:cs typeface="Noto Sans SC" pitchFamily="34" charset="-120"/>
+              </a:rPr>
+              <a:t>中午十二点</a:t>
             </a:r>
             <a:endParaRPr lang="en-US" sz="1200" dirty="0"/>
           </a:p>
@@ -19683,12 +19617,48 @@
                 <a:ea typeface="Noto Sans SC" pitchFamily="34" charset="-122"/>
                 <a:cs typeface="Noto Sans SC" pitchFamily="34" charset="-120"/>
               </a:rPr>
-              <a:t>10:30</a:t>
-            </a:r>
+              <a:t>16:45</a:t>
+            </a:r>
+            <a:r>
+              <a:rPr lang="en-US" sz="1200" dirty="0">
+                <a:solidFill>
+                  <a:srgbClr val="1E2A38"/>
+                </a:solidFill>
+                <a:latin typeface="Noto Sans SC" pitchFamily="34" charset="0"/>
+                <a:ea typeface="Noto Sans SC" pitchFamily="34" charset="-122"/>
+                <a:cs typeface="Noto Sans SC" pitchFamily="34" charset="-120"/>
+              </a:rPr>
+              <a:t> → </a:t>
+            </a:r>
+            <a:r>
+              <a:rPr lang="en-US" sz="1200" b="1" dirty="0">
+                <a:solidFill>
+                  <a:srgbClr val="1E2A38"/>
+                </a:solidFill>
+                <a:latin typeface="Noto Sans SC" pitchFamily="34" charset="0"/>
+                <a:ea typeface="Noto Sans SC" pitchFamily="34" charset="-122"/>
+                <a:cs typeface="Noto Sans SC" pitchFamily="34" charset="-120"/>
+              </a:rPr>
+              <a:t>下午四点三刻</a:t>
+            </a:r>
+            <a:endParaRPr lang="en-US" sz="1200" dirty="0"/>
+          </a:p>
+          <a:p>
             <a:pPr algn="l" indent="0" marL="0">
               <a:buNone/>
             </a:pPr>
             <a:r>
+              <a:rPr lang="en-US" sz="1200" b="1" dirty="0">
+                <a:solidFill>
+                  <a:srgbClr val="C8943E"/>
+                </a:solidFill>
+                <a:latin typeface="Noto Sans SC" pitchFamily="34" charset="0"/>
+                <a:ea typeface="Noto Sans SC" pitchFamily="34" charset="-122"/>
+                <a:cs typeface="Noto Sans SC" pitchFamily="34" charset="-120"/>
+              </a:rPr>
+              <a:t>20:15</a:t>
+            </a:r>
+            <a:r>
               <a:rPr lang="en-US" sz="1200" dirty="0">
                 <a:solidFill>
                   <a:srgbClr val="1E2A38"/>
@@ -19699,144 +19669,6 @@
               </a:rPr>
               <a:t> → </a:t>
             </a:r>
-            <a:pPr algn="l" indent="0" marL="0">
-              <a:buNone/>
-            </a:pPr>
-            <a:r>
-              <a:rPr lang="en-US" sz="1200" b="1" dirty="0">
-                <a:solidFill>
-                  <a:srgbClr val="1E2A38"/>
-                </a:solidFill>
-                <a:latin typeface="Noto Sans SC" pitchFamily="34" charset="0"/>
-                <a:ea typeface="Noto Sans SC" pitchFamily="34" charset="-122"/>
-                <a:cs typeface="Noto Sans SC" pitchFamily="34" charset="-120"/>
-              </a:rPr>
-              <a:t>上午十点半</a:t>
-            </a:r>
-            <a:endParaRPr lang="en-US" sz="1200" dirty="0"/>
-          </a:p>
-          <a:p>
-            <a:pPr algn="l" indent="0" marL="0">
-              <a:buNone/>
-            </a:pPr>
-            <a:r>
-              <a:rPr lang="en-US" sz="1200" b="1" dirty="0">
-                <a:solidFill>
-                  <a:srgbClr val="C8943E"/>
-                </a:solidFill>
-                <a:latin typeface="Noto Sans SC" pitchFamily="34" charset="0"/>
-                <a:ea typeface="Noto Sans SC" pitchFamily="34" charset="-122"/>
-                <a:cs typeface="Noto Sans SC" pitchFamily="34" charset="-120"/>
-              </a:rPr>
-              <a:t>12:00</a:t>
-            </a:r>
-            <a:pPr algn="l" indent="0" marL="0">
-              <a:buNone/>
-            </a:pPr>
-            <a:r>
-              <a:rPr lang="en-US" sz="1200" dirty="0">
-                <a:solidFill>
-                  <a:srgbClr val="1E2A38"/>
-                </a:solidFill>
-                <a:latin typeface="Noto Sans SC" pitchFamily="34" charset="0"/>
-                <a:ea typeface="Noto Sans SC" pitchFamily="34" charset="-122"/>
-                <a:cs typeface="Noto Sans SC" pitchFamily="34" charset="-120"/>
-              </a:rPr>
-              <a:t> → </a:t>
-            </a:r>
-            <a:pPr algn="l" indent="0" marL="0">
-              <a:buNone/>
-            </a:pPr>
-            <a:r>
-              <a:rPr lang="en-US" sz="1200" b="1" dirty="0">
-                <a:solidFill>
-                  <a:srgbClr val="1E2A38"/>
-                </a:solidFill>
-                <a:latin typeface="Noto Sans SC" pitchFamily="34" charset="0"/>
-                <a:ea typeface="Noto Sans SC" pitchFamily="34" charset="-122"/>
-                <a:cs typeface="Noto Sans SC" pitchFamily="34" charset="-120"/>
-              </a:rPr>
-              <a:t>中午十二点</a:t>
-            </a:r>
-            <a:endParaRPr lang="en-US" sz="1200" dirty="0"/>
-          </a:p>
-          <a:p>
-            <a:pPr algn="l" indent="0" marL="0">
-              <a:buNone/>
-            </a:pPr>
-            <a:r>
-              <a:rPr lang="en-US" sz="1200" b="1" dirty="0">
-                <a:solidFill>
-                  <a:srgbClr val="C8943E"/>
-                </a:solidFill>
-                <a:latin typeface="Noto Sans SC" pitchFamily="34" charset="0"/>
-                <a:ea typeface="Noto Sans SC" pitchFamily="34" charset="-122"/>
-                <a:cs typeface="Noto Sans SC" pitchFamily="34" charset="-120"/>
-              </a:rPr>
-              <a:t>16:45</a:t>
-            </a:r>
-            <a:pPr algn="l" indent="0" marL="0">
-              <a:buNone/>
-            </a:pPr>
-            <a:r>
-              <a:rPr lang="en-US" sz="1200" dirty="0">
-                <a:solidFill>
-                  <a:srgbClr val="1E2A38"/>
-                </a:solidFill>
-                <a:latin typeface="Noto Sans SC" pitchFamily="34" charset="0"/>
-                <a:ea typeface="Noto Sans SC" pitchFamily="34" charset="-122"/>
-                <a:cs typeface="Noto Sans SC" pitchFamily="34" charset="-120"/>
-              </a:rPr>
-              <a:t> → </a:t>
-            </a:r>
-            <a:pPr algn="l" indent="0" marL="0">
-              <a:buNone/>
-            </a:pPr>
-            <a:r>
-              <a:rPr lang="en-US" sz="1200" b="1" dirty="0">
-                <a:solidFill>
-                  <a:srgbClr val="1E2A38"/>
-                </a:solidFill>
-                <a:latin typeface="Noto Sans SC" pitchFamily="34" charset="0"/>
-                <a:ea typeface="Noto Sans SC" pitchFamily="34" charset="-122"/>
-                <a:cs typeface="Noto Sans SC" pitchFamily="34" charset="-120"/>
-              </a:rPr>
-              <a:t>下午四点三刻</a:t>
-            </a:r>
-            <a:endParaRPr lang="en-US" sz="1200" dirty="0"/>
-          </a:p>
-          <a:p>
-            <a:pPr algn="l" indent="0" marL="0">
-              <a:buNone/>
-            </a:pPr>
-            <a:r>
-              <a:rPr lang="en-US" sz="1200" b="1" dirty="0">
-                <a:solidFill>
-                  <a:srgbClr val="C8943E"/>
-                </a:solidFill>
-                <a:latin typeface="Noto Sans SC" pitchFamily="34" charset="0"/>
-                <a:ea typeface="Noto Sans SC" pitchFamily="34" charset="-122"/>
-                <a:cs typeface="Noto Sans SC" pitchFamily="34" charset="-120"/>
-              </a:rPr>
-              <a:t>20:15</a:t>
-            </a:r>
-            <a:pPr algn="l" indent="0" marL="0">
-              <a:buNone/>
-            </a:pPr>
-            <a:r>
-              <a:rPr lang="en-US" sz="1200" dirty="0">
-                <a:solidFill>
-                  <a:srgbClr val="1E2A38"/>
-                </a:solidFill>
-                <a:latin typeface="Noto Sans SC" pitchFamily="34" charset="0"/>
-                <a:ea typeface="Noto Sans SC" pitchFamily="34" charset="-122"/>
-                <a:cs typeface="Noto Sans SC" pitchFamily="34" charset="-120"/>
-              </a:rPr>
-              <a:t> → </a:t>
-            </a:r>
-            <a:pPr algn="l" indent="0" marL="0">
-              <a:buNone/>
-            </a:pPr>
             <a:r>
               <a:rPr lang="en-US" sz="1200" b="1" dirty="0">
                 <a:solidFill>
@@ -19926,12 +19758,6 @@
               </a:rPr>
               <a:t>🗣️ </a:t>
             </a:r>
-            <a:pPr algn="l" indent="0" marL="0">
-              <a:lnSpc>
-                <a:spcPts val="1575"/>
-              </a:lnSpc>
-              <a:buNone/>
-            </a:pPr>
             <a:r>
               <a:rPr lang="en-US" sz="1050" b="1" dirty="0">
                 <a:solidFill>
@@ -19943,12 +19769,6 @@
               </a:rPr>
               <a:t>Think-aloud (16:45):</a:t>
             </a:r>
-            <a:pPr algn="l" indent="0" marL="0">
-              <a:lnSpc>
-                <a:spcPts val="1575"/>
-              </a:lnSpc>
-              <a:buNone/>
-            </a:pPr>
             <a:r>
               <a:rPr lang="en-US" sz="1050" dirty="0">
                 <a:solidFill>
@@ -19960,12 +19780,6 @@
               </a:rPr>
               <a:t> First, which time-of-day word? 16:00 is afternoon → </a:t>
             </a:r>
-            <a:pPr algn="l" indent="0" marL="0">
-              <a:lnSpc>
-                <a:spcPts val="1575"/>
-              </a:lnSpc>
-              <a:buNone/>
-            </a:pPr>
             <a:r>
               <a:rPr lang="en-US" sz="1050" b="1" dirty="0">
                 <a:solidFill>
@@ -19977,12 +19791,6 @@
               </a:rPr>
               <a:t>下午</a:t>
             </a:r>
-            <a:pPr algn="l" indent="0" marL="0">
-              <a:lnSpc>
-                <a:spcPts val="1575"/>
-              </a:lnSpc>
-              <a:buNone/>
-            </a:pPr>
             <a:r>
               <a:rPr lang="en-US" sz="1050" dirty="0">
                 <a:solidFill>
@@ -19994,12 +19802,6 @@
               </a:rPr>
               <a:t>. Then the clock time: 45 minutes is </a:t>
             </a:r>
-            <a:pPr algn="l" indent="0" marL="0">
-              <a:lnSpc>
-                <a:spcPts val="1575"/>
-              </a:lnSpc>
-              <a:buNone/>
-            </a:pPr>
             <a:r>
               <a:rPr lang="en-US" sz="1050" b="1" dirty="0">
                 <a:solidFill>
@@ -20011,12 +19813,6 @@
               </a:rPr>
               <a:t>三刻</a:t>
             </a:r>
-            <a:pPr algn="l" indent="0" marL="0">
-              <a:lnSpc>
-                <a:spcPts val="1575"/>
-              </a:lnSpc>
-              <a:buNone/>
-            </a:pPr>
             <a:r>
               <a:rPr lang="en-US" sz="1050" dirty="0">
                 <a:solidFill>
@@ -20028,12 +19824,6 @@
               </a:rPr>
               <a:t>. Put them together: </a:t>
             </a:r>
-            <a:pPr algn="l" indent="0" marL="0">
-              <a:lnSpc>
-                <a:spcPts val="1575"/>
-              </a:lnSpc>
-              <a:buNone/>
-            </a:pPr>
             <a:r>
               <a:rPr lang="en-US" sz="1050" b="1" dirty="0">
                 <a:solidFill>
@@ -20045,12 +19835,6 @@
               </a:rPr>
               <a:t>下午四点三刻</a:t>
             </a:r>
-            <a:pPr algn="l" indent="0" marL="0">
-              <a:lnSpc>
-                <a:spcPts val="1575"/>
-              </a:lnSpc>
-              <a:buNone/>
-            </a:pPr>
             <a:r>
               <a:rPr lang="en-US" sz="1050" dirty="0">
                 <a:solidFill>
@@ -21295,12 +21079,6 @@
               </a:rPr>
               <a:t>晚上</a:t>
             </a:r>
-            <a:pPr algn="ctr" indent="0" marL="0">
-              <a:lnSpc>
-                <a:spcPts val="1800"/>
-              </a:lnSpc>
-              <a:buNone/>
-            </a:pPr>
             <a:r>
               <a:rPr lang="en-US" sz="1200" dirty="0">
                 <a:solidFill>
@@ -21312,12 +21090,6 @@
               </a:rPr>
               <a:t> means </a:t>
             </a:r>
-            <a:pPr algn="ctr" indent="0" marL="0">
-              <a:lnSpc>
-                <a:spcPts val="1800"/>
-              </a:lnSpc>
-              <a:buNone/>
-            </a:pPr>
             <a:r>
               <a:rPr lang="en-US" sz="1200" b="1" dirty="0">
                 <a:solidFill>
@@ -21329,12 +21101,6 @@
               </a:rPr>
               <a:t>evening</a:t>
             </a:r>
-            <a:pPr algn="ctr" indent="0" marL="0">
-              <a:lnSpc>
-                <a:spcPts val="1800"/>
-              </a:lnSpc>
-              <a:buNone/>
-            </a:pPr>
             <a:r>
               <a:rPr lang="en-US" sz="1200" dirty="0">
                 <a:solidFill>
@@ -21346,12 +21112,6 @@
               </a:rPr>
               <a:t> — not when most people get up! Most people 起床 (get up) in the </a:t>
             </a:r>
-            <a:pPr algn="ctr" indent="0" marL="0">
-              <a:lnSpc>
-                <a:spcPts val="1800"/>
-              </a:lnSpc>
-              <a:buNone/>
-            </a:pPr>
             <a:r>
               <a:rPr lang="en-US" sz="1200" b="1" dirty="0">
                 <a:solidFill>
@@ -21363,12 +21123,6 @@
               </a:rPr>
               <a:t>早上</a:t>
             </a:r>
-            <a:pPr algn="ctr" indent="0" marL="0">
-              <a:lnSpc>
-                <a:spcPts val="1800"/>
-              </a:lnSpc>
-              <a:buNone/>
-            </a:pPr>
             <a:r>
               <a:rPr lang="en-US" sz="1200" dirty="0">
                 <a:solidFill>
@@ -21380,12 +21134,6 @@
               </a:rPr>
               <a:t>, not the </a:t>
             </a:r>
-            <a:pPr algn="ctr" indent="0" marL="0">
-              <a:lnSpc>
-                <a:spcPts val="1800"/>
-              </a:lnSpc>
-              <a:buNone/>
-            </a:pPr>
             <a:r>
               <a:rPr lang="en-US" sz="1200" b="1" dirty="0">
                 <a:solidFill>
@@ -21397,12 +21145,6 @@
               </a:rPr>
               <a:t>晚上</a:t>
             </a:r>
-            <a:pPr algn="ctr" indent="0" marL="0">
-              <a:lnSpc>
-                <a:spcPts val="1800"/>
-              </a:lnSpc>
-              <a:buNone/>
-            </a:pPr>
             <a:r>
               <a:rPr lang="en-US" sz="1200" dirty="0">
                 <a:solidFill>
